--- a/prompt-engineering-course/prompt_engineering_presentation_support/PE_S4_reasoning.pptx
+++ b/prompt-engineering-course/prompt_engineering_presentation_support/PE_S4_reasoning.pptx
@@ -4281,7 +4281,7 @@
     <p:bg>
       <p:bgPr>
         <a:solidFill>
-          <a:srgbClr val="281C16"/>
+          <a:srgbClr val="301A12"/>
         </a:solidFill>
       </p:bgPr>
     </p:bg>
@@ -4307,12 +4307,12 @@
         </p:nvSpPr>
         <p:spPr>
           <a:xfrm>
-            <a:off x="10588752" y="502920"/>
-            <a:ext cx="1051560" cy="384048"/>
+            <a:off x="10405872" y="457200"/>
+            <a:ext cx="1234440" cy="457200"/>
           </a:xfrm>
           <a:prstGeom prst="roundRect">
             <a:avLst>
-              <a:gd name="adj" fmla="val 47619"/>
+              <a:gd name="adj" fmla="val 20000"/>
             </a:avLst>
           </a:prstGeom>
           <a:solidFill>
@@ -4329,8 +4329,8 @@
         </p:nvSpPr>
         <p:spPr>
           <a:xfrm>
-            <a:off x="10588752" y="502920"/>
-            <a:ext cx="1051560" cy="384048"/>
+            <a:off x="10405872" y="457200"/>
+            <a:ext cx="1234440" cy="457200"/>
           </a:xfrm>
           <a:prstGeom prst="rect">
             <a:avLst/>
@@ -4346,17 +4346,17 @@
               <a:buNone/>
             </a:pPr>
             <a:r>
-              <a:rPr lang="en-US" sz="1300" b="1" spc="200" kern="0" dirty="0">
-                <a:solidFill>
-                  <a:srgbClr val="281C16"/>
+              <a:rPr lang="en-US" sz="1400" b="1" spc="200" kern="0" dirty="0">
+                <a:solidFill>
+                  <a:srgbClr val="301A12"/>
                 </a:solidFill>
                 <a:latin typeface="Courier New" pitchFamily="34" charset="0"/>
                 <a:ea typeface="Courier New" pitchFamily="34" charset="-122"/>
                 <a:cs typeface="Courier New" pitchFamily="34" charset="-120"/>
               </a:rPr>
-              <a:t>GIT</a:t>
-            </a:r>
-            <a:endParaRPr lang="en-US" sz="1300" dirty="0"/>
+              <a:t>● GIT</a:t>
+            </a:r>
+            <a:endParaRPr lang="en-US" sz="1400" dirty="0"/>
           </a:p>
         </p:txBody>
       </p:sp>
@@ -4426,7 +4426,7 @@
             <a:r>
               <a:rPr lang="en-US" sz="3400" b="1" dirty="0">
                 <a:solidFill>
-                  <a:srgbClr val="C0CAF5"/>
+                  <a:srgbClr val="F6E6DB"/>
                 </a:solidFill>
                 <a:latin typeface="Calibri" pitchFamily="34" charset="0"/>
                 <a:ea typeface="Calibri" pitchFamily="34" charset="-122"/>
@@ -4469,7 +4469,7 @@
             <a:r>
               <a:rPr lang="en-US" sz="1600" dirty="0">
                 <a:solidFill>
-                  <a:srgbClr val="A9B1D6"/>
+                  <a:srgbClr val="E0C6B6"/>
                 </a:solidFill>
                 <a:latin typeface="Calibri" pitchFamily="34" charset="0"/>
                 <a:ea typeface="Calibri" pitchFamily="34" charset="-122"/>
@@ -4490,7 +4490,7 @@
             <a:r>
               <a:rPr lang="en-US" sz="1600" dirty="0">
                 <a:solidFill>
-                  <a:srgbClr val="A9B1D6"/>
+                  <a:srgbClr val="E0C6B6"/>
                 </a:solidFill>
                 <a:latin typeface="Calibri" pitchFamily="34" charset="0"/>
                 <a:ea typeface="Calibri" pitchFamily="34" charset="-122"/>
@@ -4511,7 +4511,7 @@
             <a:r>
               <a:rPr lang="en-US" sz="1600" dirty="0">
                 <a:solidFill>
-                  <a:srgbClr val="A9B1D6"/>
+                  <a:srgbClr val="E0C6B6"/>
                 </a:solidFill>
                 <a:latin typeface="Calibri" pitchFamily="34" charset="0"/>
                 <a:ea typeface="Calibri" pitchFamily="34" charset="-122"/>
@@ -4532,7 +4532,7 @@
             <a:r>
               <a:rPr lang="en-US" sz="1600" dirty="0">
                 <a:solidFill>
-                  <a:srgbClr val="A9B1D6"/>
+                  <a:srgbClr val="E0C6B6"/>
                 </a:solidFill>
                 <a:latin typeface="Calibri" pitchFamily="34" charset="0"/>
                 <a:ea typeface="Calibri" pitchFamily="34" charset="-122"/>
@@ -4561,7 +4561,7 @@
             </a:avLst>
           </a:prstGeom>
           <a:solidFill>
-            <a:srgbClr val="24283B"/>
+            <a:srgbClr val="3E2418"/>
           </a:solidFill>
           <a:ln w="15875">
             <a:solidFill>
@@ -4639,7 +4639,7 @@
         <p:spPr>
           <a:xfrm>
             <a:off x="7269480" y="3108960"/>
-            <a:ext cx="4160520" cy="2286000"/>
+            <a:ext cx="4160520" cy="2194560"/>
           </a:xfrm>
           <a:prstGeom prst="rect">
             <a:avLst/>
@@ -4657,7 +4657,7 @@
             <a:r>
               <a:rPr lang="en-US" sz="1600" dirty="0">
                 <a:solidFill>
-                  <a:srgbClr val="C0CAF5"/>
+                  <a:srgbClr val="F6E6DB"/>
                 </a:solidFill>
                 <a:latin typeface="Calibri" pitchFamily="34" charset="0"/>
                 <a:ea typeface="Calibri" pitchFamily="34" charset="-122"/>
@@ -4926,8 +4926,47 @@
         </p:nvSpPr>
         <p:spPr>
           <a:xfrm>
-            <a:off x="548640" y="2011680"/>
-            <a:ext cx="6126480" cy="3840480"/>
+            <a:off x="548640" y="1627632"/>
+            <a:ext cx="10881360" cy="502920"/>
+          </a:xfrm>
+          <a:prstGeom prst="rect">
+            <a:avLst/>
+          </a:prstGeom>
+          <a:noFill/>
+          <a:ln/>
+        </p:spPr>
+        <p:txBody>
+          <a:bodyPr wrap="square" lIns="0" tIns="0" rIns="0" bIns="0" rtlCol="0" anchor="t"/>
+          <a:lstStyle/>
+          <a:p>
+            <a:pPr algn="l" indent="0" marL="0">
+              <a:buNone/>
+            </a:pPr>
+            <a:r>
+              <a:rPr lang="en-US" sz="1500" dirty="0">
+                <a:solidFill>
+                  <a:srgbClr val="A9B1D6"/>
+                </a:solidFill>
+                <a:latin typeface="Calibri" pitchFamily="34" charset="0"/>
+                <a:ea typeface="Calibri" pitchFamily="34" charset="-122"/>
+                <a:cs typeface="Calibri" pitchFamily="34" charset="-120"/>
+              </a:rPr>
+              <a:t>Sometimes the fix for a wrong answer is simply giving the model room to think before it commits.</a:t>
+            </a:r>
+            <a:endParaRPr lang="en-US" sz="1500" dirty="0"/>
+          </a:p>
+        </p:txBody>
+      </p:sp>
+      <p:sp>
+        <p:nvSpPr>
+          <p:cNvPr id="5" name="Text 3"/>
+          <p:cNvSpPr txBox="1"/>
+          <p:nvPr/>
+        </p:nvSpPr>
+        <p:spPr>
+          <a:xfrm>
+            <a:off x="548640" y="2340864"/>
+            <a:ext cx="6126480" cy="3511296"/>
           </a:xfrm>
           <a:prstGeom prst="rect">
             <a:avLst/>
@@ -5065,18 +5104,18 @@
       </p:sp>
       <p:sp>
         <p:nvSpPr>
-          <p:cNvPr id="5" name="Shape 3"/>
+          <p:cNvPr id="6" name="Shape 4"/>
           <p:cNvSpPr/>
           <p:nvPr/>
         </p:nvSpPr>
         <p:spPr>
           <a:xfrm>
-            <a:off x="6995160" y="2148840"/>
-            <a:ext cx="4645152" cy="3383280"/>
+            <a:off x="6995160" y="2478024"/>
+            <a:ext cx="4645152" cy="3054096"/>
           </a:xfrm>
           <a:prstGeom prst="roundRect">
             <a:avLst>
-              <a:gd name="adj" fmla="val 2432"/>
+              <a:gd name="adj" fmla="val 2695"/>
             </a:avLst>
           </a:prstGeom>
           <a:solidFill>
@@ -5092,13 +5131,13 @@
       </p:sp>
       <p:sp>
         <p:nvSpPr>
-          <p:cNvPr id="6" name="Shape 4"/>
+          <p:cNvPr id="7" name="Shape 5"/>
           <p:cNvSpPr/>
           <p:nvPr/>
         </p:nvSpPr>
         <p:spPr>
           <a:xfrm>
-            <a:off x="7269480" y="2423160"/>
+            <a:off x="7269480" y="2752344"/>
             <a:ext cx="457200" cy="457200"/>
           </a:xfrm>
           <a:prstGeom prst="ellipse">
@@ -5112,13 +5151,13 @@
       </p:sp>
       <p:sp>
         <p:nvSpPr>
-          <p:cNvPr id="7" name="Text 5"/>
-          <p:cNvSpPr txBox="1"/>
-          <p:nvPr/>
-        </p:nvSpPr>
-        <p:spPr>
-          <a:xfrm>
-            <a:off x="7818120" y="2450592"/>
+          <p:cNvPr id="8" name="Text 6"/>
+          <p:cNvSpPr txBox="1"/>
+          <p:nvPr/>
+        </p:nvSpPr>
+        <p:spPr>
+          <a:xfrm>
+            <a:off x="7818120" y="2779776"/>
             <a:ext cx="3657600" cy="411480"/>
           </a:xfrm>
           <a:prstGeom prst="rect">
@@ -5151,14 +5190,14 @@
       </p:sp>
       <p:sp>
         <p:nvSpPr>
-          <p:cNvPr id="8" name="Text 6"/>
-          <p:cNvSpPr txBox="1"/>
-          <p:nvPr/>
-        </p:nvSpPr>
-        <p:spPr>
-          <a:xfrm>
-            <a:off x="7269480" y="3108960"/>
-            <a:ext cx="4160520" cy="2286000"/>
+          <p:cNvPr id="9" name="Text 7"/>
+          <p:cNvSpPr txBox="1"/>
+          <p:nvPr/>
+        </p:nvSpPr>
+        <p:spPr>
+          <a:xfrm>
+            <a:off x="7269480" y="3438144"/>
+            <a:ext cx="4160520" cy="1865376"/>
           </a:xfrm>
           <a:prstGeom prst="rect">
             <a:avLst/>
@@ -5190,7 +5229,7 @@
       </p:sp>
       <p:sp>
         <p:nvSpPr>
-          <p:cNvPr id="9" name="Shape 7"/>
+          <p:cNvPr id="10" name="Shape 8"/>
           <p:cNvSpPr/>
           <p:nvPr/>
         </p:nvSpPr>
@@ -5212,7 +5251,7 @@
       </p:sp>
       <p:sp>
         <p:nvSpPr>
-          <p:cNvPr id="10" name="Text 8"/>
+          <p:cNvPr id="11" name="Text 9"/>
           <p:cNvSpPr txBox="1"/>
           <p:nvPr/>
         </p:nvSpPr>
@@ -5251,7 +5290,7 @@
       </p:sp>
       <p:sp>
         <p:nvSpPr>
-          <p:cNvPr id="11" name="Text 9"/>
+          <p:cNvPr id="12" name="Text 10"/>
           <p:cNvSpPr txBox="1"/>
           <p:nvPr/>
         </p:nvSpPr>
@@ -5290,7 +5329,7 @@
       </p:sp>
       <p:sp>
         <p:nvSpPr>
-          <p:cNvPr id="12" name="Text 10"/>
+          <p:cNvPr id="13" name="Text 11"/>
           <p:cNvSpPr txBox="1"/>
           <p:nvPr/>
         </p:nvSpPr>
@@ -5445,8 +5484,47 @@
         </p:nvSpPr>
         <p:spPr>
           <a:xfrm>
-            <a:off x="548640" y="2057400"/>
-            <a:ext cx="4709160" cy="3749040"/>
+            <a:off x="548640" y="1627632"/>
+            <a:ext cx="10881360" cy="502920"/>
+          </a:xfrm>
+          <a:prstGeom prst="rect">
+            <a:avLst/>
+          </a:prstGeom>
+          <a:noFill/>
+          <a:ln/>
+        </p:spPr>
+        <p:txBody>
+          <a:bodyPr wrap="square" lIns="0" tIns="0" rIns="0" bIns="0" rtlCol="0" anchor="t"/>
+          <a:lstStyle/>
+          <a:p>
+            <a:pPr algn="l" indent="0" marL="0">
+              <a:buNone/>
+            </a:pPr>
+            <a:r>
+              <a:rPr lang="en-US" sz="1500" dirty="0">
+                <a:solidFill>
+                  <a:srgbClr val="A9B1D6"/>
+                </a:solidFill>
+                <a:latin typeface="Calibri" pitchFamily="34" charset="0"/>
+                <a:ea typeface="Calibri" pitchFamily="34" charset="-122"/>
+                <a:cs typeface="Calibri" pitchFamily="34" charset="-120"/>
+              </a:rPr>
+              <a:t>The most useful reasoning trick is also the simplest: ask for the working, then the answer.</a:t>
+            </a:r>
+            <a:endParaRPr lang="en-US" sz="1500" dirty="0"/>
+          </a:p>
+        </p:txBody>
+      </p:sp>
+      <p:sp>
+        <p:nvSpPr>
+          <p:cNvPr id="5" name="Text 3"/>
+          <p:cNvSpPr txBox="1"/>
+          <p:nvPr/>
+        </p:nvSpPr>
+        <p:spPr>
+          <a:xfrm>
+            <a:off x="548640" y="2386584"/>
+            <a:ext cx="4709160" cy="3419856"/>
           </a:xfrm>
           <a:prstGeom prst="rect">
             <a:avLst/>
@@ -5584,18 +5662,18 @@
       </p:sp>
       <p:sp>
         <p:nvSpPr>
-          <p:cNvPr id="5" name="Shape 3"/>
+          <p:cNvPr id="6" name="Shape 4"/>
           <p:cNvSpPr/>
           <p:nvPr/>
         </p:nvSpPr>
         <p:spPr>
           <a:xfrm>
-            <a:off x="5532120" y="2057400"/>
-            <a:ext cx="6108192" cy="3794760"/>
+            <a:off x="5532120" y="2386584"/>
+            <a:ext cx="6108192" cy="3465576"/>
           </a:xfrm>
           <a:prstGeom prst="roundRect">
             <a:avLst>
-              <a:gd name="adj" fmla="val 1446"/>
+              <a:gd name="adj" fmla="val 1583"/>
             </a:avLst>
           </a:prstGeom>
           <a:solidFill>
@@ -5611,13 +5689,13 @@
       </p:sp>
       <p:sp>
         <p:nvSpPr>
-          <p:cNvPr id="6" name="Text 4"/>
-          <p:cNvSpPr txBox="1"/>
-          <p:nvPr/>
-        </p:nvSpPr>
-        <p:spPr>
-          <a:xfrm>
-            <a:off x="5760720" y="2194560"/>
+          <p:cNvPr id="7" name="Text 5"/>
+          <p:cNvSpPr txBox="1"/>
+          <p:nvPr/>
+        </p:nvSpPr>
+        <p:spPr>
+          <a:xfrm>
+            <a:off x="5760720" y="2523744"/>
             <a:ext cx="5650992" cy="320040"/>
           </a:xfrm>
           <a:prstGeom prst="rect">
@@ -5650,14 +5728,14 @@
       </p:sp>
       <p:sp>
         <p:nvSpPr>
-          <p:cNvPr id="7" name="Text 5"/>
-          <p:cNvSpPr txBox="1"/>
-          <p:nvPr/>
-        </p:nvSpPr>
-        <p:spPr>
-          <a:xfrm>
-            <a:off x="5788152" y="2560320"/>
-            <a:ext cx="5596128" cy="3108960"/>
+          <p:cNvPr id="8" name="Text 6"/>
+          <p:cNvSpPr txBox="1"/>
+          <p:nvPr/>
+        </p:nvSpPr>
+        <p:spPr>
+          <a:xfrm>
+            <a:off x="5788152" y="2889504"/>
+            <a:ext cx="5596128" cy="2779776"/>
           </a:xfrm>
           <a:prstGeom prst="rect">
             <a:avLst/>
@@ -5792,7 +5870,7 @@
       </p:sp>
       <p:sp>
         <p:nvSpPr>
-          <p:cNvPr id="8" name="Shape 6"/>
+          <p:cNvPr id="9" name="Shape 7"/>
           <p:cNvSpPr/>
           <p:nvPr/>
         </p:nvSpPr>
@@ -5814,7 +5892,7 @@
       </p:sp>
       <p:sp>
         <p:nvSpPr>
-          <p:cNvPr id="9" name="Text 7"/>
+          <p:cNvPr id="10" name="Text 8"/>
           <p:cNvSpPr txBox="1"/>
           <p:nvPr/>
         </p:nvSpPr>
@@ -5853,7 +5931,7 @@
       </p:sp>
       <p:sp>
         <p:nvSpPr>
-          <p:cNvPr id="10" name="Text 8"/>
+          <p:cNvPr id="11" name="Text 9"/>
           <p:cNvSpPr txBox="1"/>
           <p:nvPr/>
         </p:nvSpPr>
@@ -5892,7 +5970,7 @@
       </p:sp>
       <p:sp>
         <p:nvSpPr>
-          <p:cNvPr id="11" name="Text 9"/>
+          <p:cNvPr id="12" name="Text 10"/>
           <p:cNvSpPr txBox="1"/>
           <p:nvPr/>
         </p:nvSpPr>
@@ -6041,13 +6119,52 @@
       </p:sp>
       <p:sp>
         <p:nvSpPr>
-          <p:cNvPr id="4" name="Shape 2"/>
+          <p:cNvPr id="4" name="Text 2"/>
+          <p:cNvSpPr txBox="1"/>
+          <p:nvPr/>
+        </p:nvSpPr>
+        <p:spPr>
+          <a:xfrm>
+            <a:off x="548640" y="1627632"/>
+            <a:ext cx="10881360" cy="502920"/>
+          </a:xfrm>
+          <a:prstGeom prst="rect">
+            <a:avLst/>
+          </a:prstGeom>
+          <a:noFill/>
+          <a:ln/>
+        </p:spPr>
+        <p:txBody>
+          <a:bodyPr wrap="square" lIns="0" tIns="0" rIns="0" bIns="0" rtlCol="0" anchor="t"/>
+          <a:lstStyle/>
+          <a:p>
+            <a:pPr algn="l" indent="0" marL="0">
+              <a:buNone/>
+            </a:pPr>
+            <a:r>
+              <a:rPr lang="en-US" sz="1500" dirty="0">
+                <a:solidFill>
+                  <a:srgbClr val="A9B1D6"/>
+                </a:solidFill>
+                <a:latin typeface="Calibri" pitchFamily="34" charset="0"/>
+                <a:ea typeface="Calibri" pitchFamily="34" charset="-122"/>
+                <a:cs typeface="Calibri" pitchFamily="34" charset="-120"/>
+              </a:rPr>
+              <a:t>When a problem is too big to solve in one leap, break it into steps you can actually check.</a:t>
+            </a:r>
+            <a:endParaRPr lang="en-US" sz="1500" dirty="0"/>
+          </a:p>
+        </p:txBody>
+      </p:sp>
+      <p:sp>
+        <p:nvSpPr>
+          <p:cNvPr id="5" name="Shape 3"/>
           <p:cNvSpPr/>
           <p:nvPr/>
         </p:nvSpPr>
         <p:spPr>
           <a:xfrm>
-            <a:off x="548640" y="2103120"/>
+            <a:off x="548640" y="2432304"/>
             <a:ext cx="530352" cy="530352"/>
           </a:xfrm>
           <a:prstGeom prst="ellipse">
@@ -6061,13 +6178,13 @@
       </p:sp>
       <p:sp>
         <p:nvSpPr>
-          <p:cNvPr id="5" name="Text 3"/>
-          <p:cNvSpPr txBox="1"/>
-          <p:nvPr/>
-        </p:nvSpPr>
-        <p:spPr>
-          <a:xfrm>
-            <a:off x="548640" y="2103120"/>
+          <p:cNvPr id="6" name="Text 4"/>
+          <p:cNvSpPr txBox="1"/>
+          <p:nvPr/>
+        </p:nvSpPr>
+        <p:spPr>
+          <a:xfrm>
+            <a:off x="548640" y="2432304"/>
             <a:ext cx="530352" cy="530352"/>
           </a:xfrm>
           <a:prstGeom prst="rect">
@@ -6100,13 +6217,13 @@
       </p:sp>
       <p:sp>
         <p:nvSpPr>
-          <p:cNvPr id="6" name="Text 4"/>
-          <p:cNvSpPr txBox="1"/>
-          <p:nvPr/>
-        </p:nvSpPr>
-        <p:spPr>
-          <a:xfrm>
-            <a:off x="1325880" y="2084832"/>
+          <p:cNvPr id="7" name="Text 5"/>
+          <p:cNvSpPr txBox="1"/>
+          <p:nvPr/>
+        </p:nvSpPr>
+        <p:spPr>
+          <a:xfrm>
+            <a:off x="1325880" y="2414016"/>
             <a:ext cx="10424160" cy="411480"/>
           </a:xfrm>
           <a:prstGeom prst="rect">
@@ -6139,14 +6256,14 @@
       </p:sp>
       <p:sp>
         <p:nvSpPr>
-          <p:cNvPr id="7" name="Text 5"/>
-          <p:cNvSpPr txBox="1"/>
-          <p:nvPr/>
-        </p:nvSpPr>
-        <p:spPr>
-          <a:xfrm>
-            <a:off x="1325880" y="2468880"/>
-            <a:ext cx="10424160" cy="667512"/>
+          <p:cNvPr id="8" name="Text 6"/>
+          <p:cNvSpPr txBox="1"/>
+          <p:nvPr/>
+        </p:nvSpPr>
+        <p:spPr>
+          <a:xfrm>
+            <a:off x="1325880" y="2798064"/>
+            <a:ext cx="10424160" cy="585216"/>
           </a:xfrm>
           <a:prstGeom prst="rect">
             <a:avLst/>
@@ -6178,13 +6295,13 @@
       </p:sp>
       <p:sp>
         <p:nvSpPr>
-          <p:cNvPr id="8" name="Shape 6"/>
+          <p:cNvPr id="9" name="Shape 7"/>
           <p:cNvSpPr/>
           <p:nvPr/>
         </p:nvSpPr>
         <p:spPr>
           <a:xfrm>
-            <a:off x="548640" y="3209544"/>
+            <a:off x="548640" y="3456432"/>
             <a:ext cx="530352" cy="530352"/>
           </a:xfrm>
           <a:prstGeom prst="ellipse">
@@ -6198,13 +6315,13 @@
       </p:sp>
       <p:sp>
         <p:nvSpPr>
-          <p:cNvPr id="9" name="Text 7"/>
-          <p:cNvSpPr txBox="1"/>
-          <p:nvPr/>
-        </p:nvSpPr>
-        <p:spPr>
-          <a:xfrm>
-            <a:off x="548640" y="3209544"/>
+          <p:cNvPr id="10" name="Text 8"/>
+          <p:cNvSpPr txBox="1"/>
+          <p:nvPr/>
+        </p:nvSpPr>
+        <p:spPr>
+          <a:xfrm>
+            <a:off x="548640" y="3456432"/>
             <a:ext cx="530352" cy="530352"/>
           </a:xfrm>
           <a:prstGeom prst="rect">
@@ -6237,13 +6354,13 @@
       </p:sp>
       <p:sp>
         <p:nvSpPr>
-          <p:cNvPr id="10" name="Text 8"/>
-          <p:cNvSpPr txBox="1"/>
-          <p:nvPr/>
-        </p:nvSpPr>
-        <p:spPr>
-          <a:xfrm>
-            <a:off x="1325880" y="3191256"/>
+          <p:cNvPr id="11" name="Text 9"/>
+          <p:cNvSpPr txBox="1"/>
+          <p:nvPr/>
+        </p:nvSpPr>
+        <p:spPr>
+          <a:xfrm>
+            <a:off x="1325880" y="3438144"/>
             <a:ext cx="10424160" cy="411480"/>
           </a:xfrm>
           <a:prstGeom prst="rect">
@@ -6276,14 +6393,14 @@
       </p:sp>
       <p:sp>
         <p:nvSpPr>
-          <p:cNvPr id="11" name="Text 9"/>
-          <p:cNvSpPr txBox="1"/>
-          <p:nvPr/>
-        </p:nvSpPr>
-        <p:spPr>
-          <a:xfrm>
-            <a:off x="1325880" y="3575304"/>
-            <a:ext cx="10424160" cy="667512"/>
+          <p:cNvPr id="12" name="Text 10"/>
+          <p:cNvSpPr txBox="1"/>
+          <p:nvPr/>
+        </p:nvSpPr>
+        <p:spPr>
+          <a:xfrm>
+            <a:off x="1325880" y="3822192"/>
+            <a:ext cx="10424160" cy="585216"/>
           </a:xfrm>
           <a:prstGeom prst="rect">
             <a:avLst/>
@@ -6315,13 +6432,13 @@
       </p:sp>
       <p:sp>
         <p:nvSpPr>
-          <p:cNvPr id="12" name="Shape 10"/>
+          <p:cNvPr id="13" name="Shape 11"/>
           <p:cNvSpPr/>
           <p:nvPr/>
         </p:nvSpPr>
         <p:spPr>
           <a:xfrm>
-            <a:off x="548640" y="4315968"/>
+            <a:off x="548640" y="4480560"/>
             <a:ext cx="530352" cy="530352"/>
           </a:xfrm>
           <a:prstGeom prst="ellipse">
@@ -6335,13 +6452,13 @@
       </p:sp>
       <p:sp>
         <p:nvSpPr>
-          <p:cNvPr id="13" name="Text 11"/>
-          <p:cNvSpPr txBox="1"/>
-          <p:nvPr/>
-        </p:nvSpPr>
-        <p:spPr>
-          <a:xfrm>
-            <a:off x="548640" y="4315968"/>
+          <p:cNvPr id="14" name="Text 12"/>
+          <p:cNvSpPr txBox="1"/>
+          <p:nvPr/>
+        </p:nvSpPr>
+        <p:spPr>
+          <a:xfrm>
+            <a:off x="548640" y="4480560"/>
             <a:ext cx="530352" cy="530352"/>
           </a:xfrm>
           <a:prstGeom prst="rect">
@@ -6374,13 +6491,13 @@
       </p:sp>
       <p:sp>
         <p:nvSpPr>
-          <p:cNvPr id="14" name="Text 12"/>
-          <p:cNvSpPr txBox="1"/>
-          <p:nvPr/>
-        </p:nvSpPr>
-        <p:spPr>
-          <a:xfrm>
-            <a:off x="1325880" y="4297680"/>
+          <p:cNvPr id="15" name="Text 13"/>
+          <p:cNvSpPr txBox="1"/>
+          <p:nvPr/>
+        </p:nvSpPr>
+        <p:spPr>
+          <a:xfrm>
+            <a:off x="1325880" y="4462272"/>
             <a:ext cx="10424160" cy="411480"/>
           </a:xfrm>
           <a:prstGeom prst="rect">
@@ -6413,14 +6530,14 @@
       </p:sp>
       <p:sp>
         <p:nvSpPr>
-          <p:cNvPr id="15" name="Text 13"/>
-          <p:cNvSpPr txBox="1"/>
-          <p:nvPr/>
-        </p:nvSpPr>
-        <p:spPr>
-          <a:xfrm>
-            <a:off x="1325880" y="4681728"/>
-            <a:ext cx="10424160" cy="667512"/>
+          <p:cNvPr id="16" name="Text 14"/>
+          <p:cNvSpPr txBox="1"/>
+          <p:nvPr/>
+        </p:nvSpPr>
+        <p:spPr>
+          <a:xfrm>
+            <a:off x="1325880" y="4846320"/>
+            <a:ext cx="10424160" cy="585216"/>
           </a:xfrm>
           <a:prstGeom prst="rect">
             <a:avLst/>
@@ -6452,13 +6569,13 @@
       </p:sp>
       <p:sp>
         <p:nvSpPr>
-          <p:cNvPr id="16" name="Shape 14"/>
+          <p:cNvPr id="17" name="Shape 15"/>
           <p:cNvSpPr/>
           <p:nvPr/>
         </p:nvSpPr>
         <p:spPr>
           <a:xfrm>
-            <a:off x="548640" y="5422392"/>
+            <a:off x="548640" y="5504688"/>
             <a:ext cx="530352" cy="530352"/>
           </a:xfrm>
           <a:prstGeom prst="ellipse">
@@ -6472,13 +6589,13 @@
       </p:sp>
       <p:sp>
         <p:nvSpPr>
-          <p:cNvPr id="17" name="Text 15"/>
-          <p:cNvSpPr txBox="1"/>
-          <p:nvPr/>
-        </p:nvSpPr>
-        <p:spPr>
-          <a:xfrm>
-            <a:off x="548640" y="5422392"/>
+          <p:cNvPr id="18" name="Text 16"/>
+          <p:cNvSpPr txBox="1"/>
+          <p:nvPr/>
+        </p:nvSpPr>
+        <p:spPr>
+          <a:xfrm>
+            <a:off x="548640" y="5504688"/>
             <a:ext cx="530352" cy="530352"/>
           </a:xfrm>
           <a:prstGeom prst="rect">
@@ -6511,13 +6628,13 @@
       </p:sp>
       <p:sp>
         <p:nvSpPr>
-          <p:cNvPr id="18" name="Text 16"/>
-          <p:cNvSpPr txBox="1"/>
-          <p:nvPr/>
-        </p:nvSpPr>
-        <p:spPr>
-          <a:xfrm>
-            <a:off x="1325880" y="5404104"/>
+          <p:cNvPr id="19" name="Text 17"/>
+          <p:cNvSpPr txBox="1"/>
+          <p:nvPr/>
+        </p:nvSpPr>
+        <p:spPr>
+          <a:xfrm>
+            <a:off x="1325880" y="5486400"/>
             <a:ext cx="10424160" cy="411480"/>
           </a:xfrm>
           <a:prstGeom prst="rect">
@@ -6550,14 +6667,14 @@
       </p:sp>
       <p:sp>
         <p:nvSpPr>
-          <p:cNvPr id="19" name="Text 17"/>
-          <p:cNvSpPr txBox="1"/>
-          <p:nvPr/>
-        </p:nvSpPr>
-        <p:spPr>
-          <a:xfrm>
-            <a:off x="1325880" y="5788152"/>
-            <a:ext cx="10424160" cy="667512"/>
+          <p:cNvPr id="20" name="Text 18"/>
+          <p:cNvSpPr txBox="1"/>
+          <p:nvPr/>
+        </p:nvSpPr>
+        <p:spPr>
+          <a:xfrm>
+            <a:off x="1325880" y="5870448"/>
+            <a:ext cx="10424160" cy="585216"/>
           </a:xfrm>
           <a:prstGeom prst="rect">
             <a:avLst/>
@@ -6589,7 +6706,7 @@
       </p:sp>
       <p:sp>
         <p:nvSpPr>
-          <p:cNvPr id="20" name="Shape 18"/>
+          <p:cNvPr id="21" name="Shape 19"/>
           <p:cNvSpPr/>
           <p:nvPr/>
         </p:nvSpPr>
@@ -6611,7 +6728,7 @@
       </p:sp>
       <p:sp>
         <p:nvSpPr>
-          <p:cNvPr id="21" name="Text 19"/>
+          <p:cNvPr id="22" name="Text 20"/>
           <p:cNvSpPr txBox="1"/>
           <p:nvPr/>
         </p:nvSpPr>
@@ -6650,7 +6767,7 @@
       </p:sp>
       <p:sp>
         <p:nvSpPr>
-          <p:cNvPr id="22" name="Text 20"/>
+          <p:cNvPr id="23" name="Text 21"/>
           <p:cNvSpPr txBox="1"/>
           <p:nvPr/>
         </p:nvSpPr>
@@ -6689,7 +6806,7 @@
       </p:sp>
       <p:sp>
         <p:nvSpPr>
-          <p:cNvPr id="23" name="Text 21"/>
+          <p:cNvPr id="24" name="Text 22"/>
           <p:cNvSpPr txBox="1"/>
           <p:nvPr/>
         </p:nvSpPr>
@@ -6838,13 +6955,52 @@
       </p:sp>
       <p:sp>
         <p:nvSpPr>
-          <p:cNvPr id="4" name="Shape 2"/>
+          <p:cNvPr id="4" name="Text 2"/>
+          <p:cNvSpPr txBox="1"/>
+          <p:nvPr/>
+        </p:nvSpPr>
+        <p:spPr>
+          <a:xfrm>
+            <a:off x="548640" y="1627632"/>
+            <a:ext cx="10881360" cy="502920"/>
+          </a:xfrm>
+          <a:prstGeom prst="rect">
+            <a:avLst/>
+          </a:prstGeom>
+          <a:noFill/>
+          <a:ln/>
+        </p:spPr>
+        <p:txBody>
+          <a:bodyPr wrap="square" lIns="0" tIns="0" rIns="0" bIns="0" rtlCol="0" anchor="t"/>
+          <a:lstStyle/>
+          <a:p>
+            <a:pPr algn="l" indent="0" marL="0">
+              <a:buNone/>
+            </a:pPr>
+            <a:r>
+              <a:rPr lang="en-US" sz="1500" dirty="0">
+                <a:solidFill>
+                  <a:srgbClr val="A9B1D6"/>
+                </a:solidFill>
+                <a:latin typeface="Calibri" pitchFamily="34" charset="0"/>
+                <a:ea typeface="Calibri" pitchFamily="34" charset="-122"/>
+                <a:cs typeface="Calibri" pitchFamily="34" charset="-120"/>
+              </a:rPr>
+              <a:t>A few more tools for when you need the reasoning to be robust, not just present — each with a cost.</a:t>
+            </a:r>
+            <a:endParaRPr lang="en-US" sz="1500" dirty="0"/>
+          </a:p>
+        </p:txBody>
+      </p:sp>
+      <p:sp>
+        <p:nvSpPr>
+          <p:cNvPr id="5" name="Shape 3"/>
           <p:cNvSpPr/>
           <p:nvPr/>
         </p:nvSpPr>
         <p:spPr>
           <a:xfrm>
-            <a:off x="548640" y="2103120"/>
+            <a:off x="548640" y="2432304"/>
             <a:ext cx="5394960" cy="1810512"/>
           </a:xfrm>
           <a:prstGeom prst="roundRect">
@@ -6865,13 +7021,13 @@
       </p:sp>
       <p:sp>
         <p:nvSpPr>
-          <p:cNvPr id="5" name="Shape 3"/>
+          <p:cNvPr id="6" name="Shape 4"/>
           <p:cNvSpPr/>
           <p:nvPr/>
         </p:nvSpPr>
         <p:spPr>
           <a:xfrm>
-            <a:off x="822960" y="2395728"/>
+            <a:off x="822960" y="2724912"/>
             <a:ext cx="548640" cy="548640"/>
           </a:xfrm>
           <a:prstGeom prst="ellipse">
@@ -6885,13 +7041,13 @@
       </p:sp>
       <p:sp>
         <p:nvSpPr>
-          <p:cNvPr id="6" name="Text 4"/>
-          <p:cNvSpPr txBox="1"/>
-          <p:nvPr/>
-        </p:nvSpPr>
-        <p:spPr>
-          <a:xfrm>
-            <a:off x="822960" y="2395728"/>
+          <p:cNvPr id="7" name="Text 5"/>
+          <p:cNvSpPr txBox="1"/>
+          <p:nvPr/>
+        </p:nvSpPr>
+        <p:spPr>
+          <a:xfrm>
+            <a:off x="822960" y="2724912"/>
             <a:ext cx="548640" cy="548640"/>
           </a:xfrm>
           <a:prstGeom prst="rect">
@@ -6924,13 +7080,13 @@
       </p:sp>
       <p:sp>
         <p:nvSpPr>
-          <p:cNvPr id="7" name="Text 5"/>
-          <p:cNvSpPr txBox="1"/>
-          <p:nvPr/>
-        </p:nvSpPr>
-        <p:spPr>
-          <a:xfrm>
-            <a:off x="1508760" y="2359152"/>
+          <p:cNvPr id="8" name="Text 6"/>
+          <p:cNvSpPr txBox="1"/>
+          <p:nvPr/>
+        </p:nvSpPr>
+        <p:spPr>
+          <a:xfrm>
+            <a:off x="1508760" y="2688336"/>
             <a:ext cx="4206240" cy="548640"/>
           </a:xfrm>
           <a:prstGeom prst="rect">
@@ -6963,13 +7119,13 @@
       </p:sp>
       <p:sp>
         <p:nvSpPr>
-          <p:cNvPr id="8" name="Text 6"/>
-          <p:cNvSpPr txBox="1"/>
-          <p:nvPr/>
-        </p:nvSpPr>
-        <p:spPr>
-          <a:xfrm>
-            <a:off x="822960" y="3017520"/>
+          <p:cNvPr id="9" name="Text 7"/>
+          <p:cNvSpPr txBox="1"/>
+          <p:nvPr/>
+        </p:nvSpPr>
+        <p:spPr>
+          <a:xfrm>
+            <a:off x="822960" y="3346704"/>
             <a:ext cx="4846320" cy="822960"/>
           </a:xfrm>
           <a:prstGeom prst="rect">
@@ -7002,13 +7158,13 @@
       </p:sp>
       <p:sp>
         <p:nvSpPr>
-          <p:cNvPr id="9" name="Shape 7"/>
+          <p:cNvPr id="10" name="Shape 8"/>
           <p:cNvSpPr/>
           <p:nvPr/>
         </p:nvSpPr>
         <p:spPr>
           <a:xfrm>
-            <a:off x="6245352" y="2103120"/>
+            <a:off x="6245352" y="2432304"/>
             <a:ext cx="5394960" cy="1810512"/>
           </a:xfrm>
           <a:prstGeom prst="roundRect">
@@ -7029,13 +7185,13 @@
       </p:sp>
       <p:sp>
         <p:nvSpPr>
-          <p:cNvPr id="10" name="Shape 8"/>
+          <p:cNvPr id="11" name="Shape 9"/>
           <p:cNvSpPr/>
           <p:nvPr/>
         </p:nvSpPr>
         <p:spPr>
           <a:xfrm>
-            <a:off x="6519672" y="2395728"/>
+            <a:off x="6519672" y="2724912"/>
             <a:ext cx="548640" cy="548640"/>
           </a:xfrm>
           <a:prstGeom prst="ellipse">
@@ -7049,13 +7205,13 @@
       </p:sp>
       <p:sp>
         <p:nvSpPr>
-          <p:cNvPr id="11" name="Text 9"/>
-          <p:cNvSpPr txBox="1"/>
-          <p:nvPr/>
-        </p:nvSpPr>
-        <p:spPr>
-          <a:xfrm>
-            <a:off x="6519672" y="2395728"/>
+          <p:cNvPr id="12" name="Text 10"/>
+          <p:cNvSpPr txBox="1"/>
+          <p:nvPr/>
+        </p:nvSpPr>
+        <p:spPr>
+          <a:xfrm>
+            <a:off x="6519672" y="2724912"/>
             <a:ext cx="548640" cy="548640"/>
           </a:xfrm>
           <a:prstGeom prst="rect">
@@ -7088,13 +7244,13 @@
       </p:sp>
       <p:sp>
         <p:nvSpPr>
-          <p:cNvPr id="12" name="Text 10"/>
-          <p:cNvSpPr txBox="1"/>
-          <p:nvPr/>
-        </p:nvSpPr>
-        <p:spPr>
-          <a:xfrm>
-            <a:off x="7205472" y="2359152"/>
+          <p:cNvPr id="13" name="Text 11"/>
+          <p:cNvSpPr txBox="1"/>
+          <p:nvPr/>
+        </p:nvSpPr>
+        <p:spPr>
+          <a:xfrm>
+            <a:off x="7205472" y="2688336"/>
             <a:ext cx="4206240" cy="548640"/>
           </a:xfrm>
           <a:prstGeom prst="rect">
@@ -7127,13 +7283,13 @@
       </p:sp>
       <p:sp>
         <p:nvSpPr>
-          <p:cNvPr id="13" name="Text 11"/>
-          <p:cNvSpPr txBox="1"/>
-          <p:nvPr/>
-        </p:nvSpPr>
-        <p:spPr>
-          <a:xfrm>
-            <a:off x="6519672" y="3017520"/>
+          <p:cNvPr id="14" name="Text 12"/>
+          <p:cNvSpPr txBox="1"/>
+          <p:nvPr/>
+        </p:nvSpPr>
+        <p:spPr>
+          <a:xfrm>
+            <a:off x="6519672" y="3346704"/>
             <a:ext cx="4846320" cy="822960"/>
           </a:xfrm>
           <a:prstGeom prst="rect">
@@ -7166,13 +7322,13 @@
       </p:sp>
       <p:sp>
         <p:nvSpPr>
-          <p:cNvPr id="14" name="Shape 12"/>
+          <p:cNvPr id="15" name="Shape 13"/>
           <p:cNvSpPr/>
           <p:nvPr/>
         </p:nvSpPr>
         <p:spPr>
           <a:xfrm>
-            <a:off x="548640" y="4114800"/>
+            <a:off x="548640" y="4443984"/>
             <a:ext cx="5394960" cy="1810512"/>
           </a:xfrm>
           <a:prstGeom prst="roundRect">
@@ -7193,13 +7349,13 @@
       </p:sp>
       <p:sp>
         <p:nvSpPr>
-          <p:cNvPr id="15" name="Shape 13"/>
+          <p:cNvPr id="16" name="Shape 14"/>
           <p:cNvSpPr/>
           <p:nvPr/>
         </p:nvSpPr>
         <p:spPr>
           <a:xfrm>
-            <a:off x="822960" y="4407408"/>
+            <a:off x="822960" y="4736592"/>
             <a:ext cx="548640" cy="548640"/>
           </a:xfrm>
           <a:prstGeom prst="ellipse">
@@ -7213,13 +7369,13 @@
       </p:sp>
       <p:sp>
         <p:nvSpPr>
-          <p:cNvPr id="16" name="Text 14"/>
-          <p:cNvSpPr txBox="1"/>
-          <p:nvPr/>
-        </p:nvSpPr>
-        <p:spPr>
-          <a:xfrm>
-            <a:off x="822960" y="4407408"/>
+          <p:cNvPr id="17" name="Text 15"/>
+          <p:cNvSpPr txBox="1"/>
+          <p:nvPr/>
+        </p:nvSpPr>
+        <p:spPr>
+          <a:xfrm>
+            <a:off x="822960" y="4736592"/>
             <a:ext cx="548640" cy="548640"/>
           </a:xfrm>
           <a:prstGeom prst="rect">
@@ -7252,13 +7408,13 @@
       </p:sp>
       <p:sp>
         <p:nvSpPr>
-          <p:cNvPr id="17" name="Text 15"/>
-          <p:cNvSpPr txBox="1"/>
-          <p:nvPr/>
-        </p:nvSpPr>
-        <p:spPr>
-          <a:xfrm>
-            <a:off x="1508760" y="4370832"/>
+          <p:cNvPr id="18" name="Text 16"/>
+          <p:cNvSpPr txBox="1"/>
+          <p:nvPr/>
+        </p:nvSpPr>
+        <p:spPr>
+          <a:xfrm>
+            <a:off x="1508760" y="4700016"/>
             <a:ext cx="4206240" cy="548640"/>
           </a:xfrm>
           <a:prstGeom prst="rect">
@@ -7291,13 +7447,13 @@
       </p:sp>
       <p:sp>
         <p:nvSpPr>
-          <p:cNvPr id="18" name="Text 16"/>
-          <p:cNvSpPr txBox="1"/>
-          <p:nvPr/>
-        </p:nvSpPr>
-        <p:spPr>
-          <a:xfrm>
-            <a:off x="822960" y="5029200"/>
+          <p:cNvPr id="19" name="Text 17"/>
+          <p:cNvSpPr txBox="1"/>
+          <p:nvPr/>
+        </p:nvSpPr>
+        <p:spPr>
+          <a:xfrm>
+            <a:off x="822960" y="5358384"/>
             <a:ext cx="4846320" cy="822960"/>
           </a:xfrm>
           <a:prstGeom prst="rect">
@@ -7330,13 +7486,13 @@
       </p:sp>
       <p:sp>
         <p:nvSpPr>
-          <p:cNvPr id="19" name="Shape 17"/>
+          <p:cNvPr id="20" name="Shape 18"/>
           <p:cNvSpPr/>
           <p:nvPr/>
         </p:nvSpPr>
         <p:spPr>
           <a:xfrm>
-            <a:off x="6245352" y="4114800"/>
+            <a:off x="6245352" y="4443984"/>
             <a:ext cx="5394960" cy="1810512"/>
           </a:xfrm>
           <a:prstGeom prst="roundRect">
@@ -7357,13 +7513,13 @@
       </p:sp>
       <p:sp>
         <p:nvSpPr>
-          <p:cNvPr id="20" name="Shape 18"/>
+          <p:cNvPr id="21" name="Shape 19"/>
           <p:cNvSpPr/>
           <p:nvPr/>
         </p:nvSpPr>
         <p:spPr>
           <a:xfrm>
-            <a:off x="6519672" y="4407408"/>
+            <a:off x="6519672" y="4736592"/>
             <a:ext cx="548640" cy="548640"/>
           </a:xfrm>
           <a:prstGeom prst="ellipse">
@@ -7377,13 +7533,13 @@
       </p:sp>
       <p:sp>
         <p:nvSpPr>
-          <p:cNvPr id="21" name="Text 19"/>
-          <p:cNvSpPr txBox="1"/>
-          <p:nvPr/>
-        </p:nvSpPr>
-        <p:spPr>
-          <a:xfrm>
-            <a:off x="6519672" y="4407408"/>
+          <p:cNvPr id="22" name="Text 20"/>
+          <p:cNvSpPr txBox="1"/>
+          <p:nvPr/>
+        </p:nvSpPr>
+        <p:spPr>
+          <a:xfrm>
+            <a:off x="6519672" y="4736592"/>
             <a:ext cx="548640" cy="548640"/>
           </a:xfrm>
           <a:prstGeom prst="rect">
@@ -7416,13 +7572,13 @@
       </p:sp>
       <p:sp>
         <p:nvSpPr>
-          <p:cNvPr id="22" name="Text 20"/>
-          <p:cNvSpPr txBox="1"/>
-          <p:nvPr/>
-        </p:nvSpPr>
-        <p:spPr>
-          <a:xfrm>
-            <a:off x="7205472" y="4370832"/>
+          <p:cNvPr id="23" name="Text 21"/>
+          <p:cNvSpPr txBox="1"/>
+          <p:nvPr/>
+        </p:nvSpPr>
+        <p:spPr>
+          <a:xfrm>
+            <a:off x="7205472" y="4700016"/>
             <a:ext cx="4206240" cy="548640"/>
           </a:xfrm>
           <a:prstGeom prst="rect">
@@ -7455,13 +7611,13 @@
       </p:sp>
       <p:sp>
         <p:nvSpPr>
-          <p:cNvPr id="23" name="Text 21"/>
-          <p:cNvSpPr txBox="1"/>
-          <p:nvPr/>
-        </p:nvSpPr>
-        <p:spPr>
-          <a:xfrm>
-            <a:off x="6519672" y="5029200"/>
+          <p:cNvPr id="24" name="Text 22"/>
+          <p:cNvSpPr txBox="1"/>
+          <p:nvPr/>
+        </p:nvSpPr>
+        <p:spPr>
+          <a:xfrm>
+            <a:off x="6519672" y="5358384"/>
             <a:ext cx="4846320" cy="822960"/>
           </a:xfrm>
           <a:prstGeom prst="rect">
@@ -7494,7 +7650,7 @@
       </p:sp>
       <p:sp>
         <p:nvSpPr>
-          <p:cNvPr id="24" name="Shape 22"/>
+          <p:cNvPr id="25" name="Shape 23"/>
           <p:cNvSpPr/>
           <p:nvPr/>
         </p:nvSpPr>
@@ -7516,7 +7672,7 @@
       </p:sp>
       <p:sp>
         <p:nvSpPr>
-          <p:cNvPr id="25" name="Text 23"/>
+          <p:cNvPr id="26" name="Text 24"/>
           <p:cNvSpPr txBox="1"/>
           <p:nvPr/>
         </p:nvSpPr>
@@ -7555,7 +7711,7 @@
       </p:sp>
       <p:sp>
         <p:nvSpPr>
-          <p:cNvPr id="26" name="Text 24"/>
+          <p:cNvPr id="27" name="Text 25"/>
           <p:cNvSpPr txBox="1"/>
           <p:nvPr/>
         </p:nvSpPr>
@@ -7594,7 +7750,7 @@
       </p:sp>
       <p:sp>
         <p:nvSpPr>
-          <p:cNvPr id="27" name="Text 25"/>
+          <p:cNvPr id="28" name="Text 26"/>
           <p:cNvSpPr txBox="1"/>
           <p:nvPr/>
         </p:nvSpPr>
@@ -7749,8 +7905,47 @@
         </p:nvSpPr>
         <p:spPr>
           <a:xfrm>
-            <a:off x="548640" y="2057400"/>
-            <a:ext cx="4709160" cy="3749040"/>
+            <a:off x="548640" y="1627632"/>
+            <a:ext cx="10881360" cy="502920"/>
+          </a:xfrm>
+          <a:prstGeom prst="rect">
+            <a:avLst/>
+          </a:prstGeom>
+          <a:noFill/>
+          <a:ln/>
+        </p:spPr>
+        <p:txBody>
+          <a:bodyPr wrap="square" lIns="0" tIns="0" rIns="0" bIns="0" rtlCol="0" anchor="t"/>
+          <a:lstStyle/>
+          <a:p>
+            <a:pPr algn="l" indent="0" marL="0">
+              <a:buNone/>
+            </a:pPr>
+            <a:r>
+              <a:rPr lang="en-US" sz="1500" dirty="0">
+                <a:solidFill>
+                  <a:srgbClr val="A9B1D6"/>
+                </a:solidFill>
+                <a:latin typeface="Calibri" pitchFamily="34" charset="0"/>
+                <a:ea typeface="Calibri" pitchFamily="34" charset="-122"/>
+                <a:cs typeface="Calibri" pitchFamily="34" charset="-120"/>
+              </a:rPr>
+              <a:t>Reasoning gets more powerful when the model can reach outside itself between thoughts — this is the seed of an agent.</a:t>
+            </a:r>
+            <a:endParaRPr lang="en-US" sz="1500" dirty="0"/>
+          </a:p>
+        </p:txBody>
+      </p:sp>
+      <p:sp>
+        <p:nvSpPr>
+          <p:cNvPr id="5" name="Text 3"/>
+          <p:cNvSpPr txBox="1"/>
+          <p:nvPr/>
+        </p:nvSpPr>
+        <p:spPr>
+          <a:xfrm>
+            <a:off x="548640" y="2386584"/>
+            <a:ext cx="4709160" cy="3419856"/>
           </a:xfrm>
           <a:prstGeom prst="rect">
             <a:avLst/>
@@ -7888,18 +8083,18 @@
       </p:sp>
       <p:sp>
         <p:nvSpPr>
-          <p:cNvPr id="5" name="Shape 3"/>
+          <p:cNvPr id="6" name="Shape 4"/>
           <p:cNvSpPr/>
           <p:nvPr/>
         </p:nvSpPr>
         <p:spPr>
           <a:xfrm>
-            <a:off x="5532120" y="2057400"/>
-            <a:ext cx="6108192" cy="3794760"/>
+            <a:off x="5532120" y="2386584"/>
+            <a:ext cx="6108192" cy="3465576"/>
           </a:xfrm>
           <a:prstGeom prst="roundRect">
             <a:avLst>
-              <a:gd name="adj" fmla="val 1446"/>
+              <a:gd name="adj" fmla="val 1583"/>
             </a:avLst>
           </a:prstGeom>
           <a:solidFill>
@@ -7915,13 +8110,13 @@
       </p:sp>
       <p:sp>
         <p:nvSpPr>
-          <p:cNvPr id="6" name="Text 4"/>
-          <p:cNvSpPr txBox="1"/>
-          <p:nvPr/>
-        </p:nvSpPr>
-        <p:spPr>
-          <a:xfrm>
-            <a:off x="5760720" y="2194560"/>
+          <p:cNvPr id="7" name="Text 5"/>
+          <p:cNvSpPr txBox="1"/>
+          <p:nvPr/>
+        </p:nvSpPr>
+        <p:spPr>
+          <a:xfrm>
+            <a:off x="5760720" y="2523744"/>
             <a:ext cx="5650992" cy="320040"/>
           </a:xfrm>
           <a:prstGeom prst="rect">
@@ -7954,14 +8149,14 @@
       </p:sp>
       <p:sp>
         <p:nvSpPr>
-          <p:cNvPr id="7" name="Text 5"/>
-          <p:cNvSpPr txBox="1"/>
-          <p:nvPr/>
-        </p:nvSpPr>
-        <p:spPr>
-          <a:xfrm>
-            <a:off x="5788152" y="2560320"/>
-            <a:ext cx="5596128" cy="3108960"/>
+          <p:cNvPr id="8" name="Text 6"/>
+          <p:cNvSpPr txBox="1"/>
+          <p:nvPr/>
+        </p:nvSpPr>
+        <p:spPr>
+          <a:xfrm>
+            <a:off x="5788152" y="2889504"/>
+            <a:ext cx="5596128" cy="2779776"/>
           </a:xfrm>
           <a:prstGeom prst="rect">
             <a:avLst/>
@@ -8144,7 +8339,7 @@
       </p:sp>
       <p:sp>
         <p:nvSpPr>
-          <p:cNvPr id="8" name="Shape 6"/>
+          <p:cNvPr id="9" name="Shape 7"/>
           <p:cNvSpPr/>
           <p:nvPr/>
         </p:nvSpPr>
@@ -8166,7 +8361,7 @@
       </p:sp>
       <p:sp>
         <p:nvSpPr>
-          <p:cNvPr id="9" name="Text 7"/>
+          <p:cNvPr id="10" name="Text 8"/>
           <p:cNvSpPr txBox="1"/>
           <p:nvPr/>
         </p:nvSpPr>
@@ -8205,7 +8400,7 @@
       </p:sp>
       <p:sp>
         <p:nvSpPr>
-          <p:cNvPr id="10" name="Text 8"/>
+          <p:cNvPr id="11" name="Text 9"/>
           <p:cNvSpPr txBox="1"/>
           <p:nvPr/>
         </p:nvSpPr>
@@ -8244,7 +8439,7 @@
       </p:sp>
       <p:sp>
         <p:nvSpPr>
-          <p:cNvPr id="11" name="Text 9"/>
+          <p:cNvPr id="12" name="Text 10"/>
           <p:cNvSpPr txBox="1"/>
           <p:nvPr/>
         </p:nvSpPr>
@@ -8399,8 +8594,47 @@
         </p:nvSpPr>
         <p:spPr>
           <a:xfrm>
-            <a:off x="548640" y="2057400"/>
-            <a:ext cx="4709160" cy="3749040"/>
+            <a:off x="548640" y="1627632"/>
+            <a:ext cx="10881360" cy="502920"/>
+          </a:xfrm>
+          <a:prstGeom prst="rect">
+            <a:avLst/>
+          </a:prstGeom>
+          <a:noFill/>
+          <a:ln/>
+        </p:spPr>
+        <p:txBody>
+          <a:bodyPr wrap="square" lIns="0" tIns="0" rIns="0" bIns="0" rtlCol="0" anchor="t"/>
+          <a:lstStyle/>
+          <a:p>
+            <a:pPr algn="l" indent="0" marL="0">
+              <a:buNone/>
+            </a:pPr>
+            <a:r>
+              <a:rPr lang="en-US" sz="1500" dirty="0">
+                <a:solidFill>
+                  <a:srgbClr val="A9B1D6"/>
+                </a:solidFill>
+                <a:latin typeface="Calibri" pitchFamily="34" charset="0"/>
+                <a:ea typeface="Calibri" pitchFamily="34" charset="-122"/>
+                <a:cs typeface="Calibri" pitchFamily="34" charset="-120"/>
+              </a:rPr>
+              <a:t>This is the piece that makes an LLM safe to wire into real software: output your code can actually trust.</a:t>
+            </a:r>
+            <a:endParaRPr lang="en-US" sz="1500" dirty="0"/>
+          </a:p>
+        </p:txBody>
+      </p:sp>
+      <p:sp>
+        <p:nvSpPr>
+          <p:cNvPr id="5" name="Text 3"/>
+          <p:cNvSpPr txBox="1"/>
+          <p:nvPr/>
+        </p:nvSpPr>
+        <p:spPr>
+          <a:xfrm>
+            <a:off x="548640" y="2386584"/>
+            <a:ext cx="4709160" cy="3419856"/>
           </a:xfrm>
           <a:prstGeom prst="rect">
             <a:avLst/>
@@ -8538,18 +8772,18 @@
       </p:sp>
       <p:sp>
         <p:nvSpPr>
-          <p:cNvPr id="5" name="Shape 3"/>
+          <p:cNvPr id="6" name="Shape 4"/>
           <p:cNvSpPr/>
           <p:nvPr/>
         </p:nvSpPr>
         <p:spPr>
           <a:xfrm>
-            <a:off x="5532120" y="2057400"/>
-            <a:ext cx="6108192" cy="3794760"/>
+            <a:off x="5532120" y="2386584"/>
+            <a:ext cx="6108192" cy="3465576"/>
           </a:xfrm>
           <a:prstGeom prst="roundRect">
             <a:avLst>
-              <a:gd name="adj" fmla="val 1446"/>
+              <a:gd name="adj" fmla="val 1583"/>
             </a:avLst>
           </a:prstGeom>
           <a:solidFill>
@@ -8565,13 +8799,13 @@
       </p:sp>
       <p:sp>
         <p:nvSpPr>
-          <p:cNvPr id="6" name="Text 4"/>
-          <p:cNvSpPr txBox="1"/>
-          <p:nvPr/>
-        </p:nvSpPr>
-        <p:spPr>
-          <a:xfrm>
-            <a:off x="5760720" y="2194560"/>
+          <p:cNvPr id="7" name="Text 5"/>
+          <p:cNvSpPr txBox="1"/>
+          <p:nvPr/>
+        </p:nvSpPr>
+        <p:spPr>
+          <a:xfrm>
+            <a:off x="5760720" y="2523744"/>
             <a:ext cx="5650992" cy="320040"/>
           </a:xfrm>
           <a:prstGeom prst="rect">
@@ -8604,14 +8838,14 @@
       </p:sp>
       <p:sp>
         <p:nvSpPr>
-          <p:cNvPr id="7" name="Text 5"/>
-          <p:cNvSpPr txBox="1"/>
-          <p:nvPr/>
-        </p:nvSpPr>
-        <p:spPr>
-          <a:xfrm>
-            <a:off x="5788152" y="2560320"/>
-            <a:ext cx="5596128" cy="3108960"/>
+          <p:cNvPr id="8" name="Text 6"/>
+          <p:cNvSpPr txBox="1"/>
+          <p:nvPr/>
+        </p:nvSpPr>
+        <p:spPr>
+          <a:xfrm>
+            <a:off x="5788152" y="2889504"/>
+            <a:ext cx="5596128" cy="2779776"/>
           </a:xfrm>
           <a:prstGeom prst="rect">
             <a:avLst/>
@@ -8814,7 +9048,7 @@
       </p:sp>
       <p:sp>
         <p:nvSpPr>
-          <p:cNvPr id="8" name="Shape 6"/>
+          <p:cNvPr id="9" name="Shape 7"/>
           <p:cNvSpPr/>
           <p:nvPr/>
         </p:nvSpPr>
@@ -8836,7 +9070,7 @@
       </p:sp>
       <p:sp>
         <p:nvSpPr>
-          <p:cNvPr id="9" name="Text 7"/>
+          <p:cNvPr id="10" name="Text 8"/>
           <p:cNvSpPr txBox="1"/>
           <p:nvPr/>
         </p:nvSpPr>
@@ -8875,7 +9109,7 @@
       </p:sp>
       <p:sp>
         <p:nvSpPr>
-          <p:cNvPr id="10" name="Text 8"/>
+          <p:cNvPr id="11" name="Text 9"/>
           <p:cNvSpPr txBox="1"/>
           <p:nvPr/>
         </p:nvSpPr>
@@ -8914,7 +9148,7 @@
       </p:sp>
       <p:sp>
         <p:nvSpPr>
-          <p:cNvPr id="11" name="Text 9"/>
+          <p:cNvPr id="12" name="Text 10"/>
           <p:cNvSpPr txBox="1"/>
           <p:nvPr/>
         </p:nvSpPr>
